--- a/docs/presentation/pretrain_Jiaqi_0527_MoE_zh.pptx
+++ b/docs/presentation/pretrain_Jiaqi_0527_MoE_zh.pptx
@@ -12,6 +12,9 @@
     <p:sldId id="260" r:id="rId11"/>
     <p:sldId id="261" r:id="rId12"/>
     <p:sldId id="262" r:id="rId13"/>
+    <p:sldId id="263" r:id="rId14"/>
+    <p:sldId id="264" r:id="rId15"/>
+    <p:sldId id="265" r:id="rId16"/>
   </p:sldIdLst>
   <p:sldSz cx="12191695" cy="6858000" type="screen4x3"/>
   <p:notesSz cx="6858000" cy="9144000"/>
@@ -3245,7 +3248,515 @@
                 </a:solidFill>
                 <a:latin typeface="Consolas"/>
               </a:rPr>
-              <a:t>01 / 7</a:t>
+              <a:t>01 / 10</a:t>
+            </a:r>
+          </a:p>
+        </p:txBody>
+      </p:sp>
+    </p:spTree>
+  </p:cSld>
+  <p:clrMapOvr>
+    <a:masterClrMapping/>
+  </p:clrMapOvr>
+</p:sld>
+</file>
+
+<file path=ppt/slides/slide10.xml><?xml version="1.0" encoding="utf-8"?>
+<p:sld xmlns:a="http://schemas.openxmlformats.org/drawingml/2006/main" xmlns:p="http://schemas.openxmlformats.org/presentationml/2006/main" xmlns:r="http://schemas.openxmlformats.org/officeDocument/2006/relationships">
+  <p:cSld>
+    <p:bg>
+      <p:bgPr>
+        <a:solidFill>
+          <a:srgbClr val="F7F8FA"/>
+        </a:solidFill>
+        <a:effectLst/>
+      </p:bgPr>
+    </p:bg>
+    <p:spTree>
+      <p:nvGrpSpPr>
+        <p:cNvPr id="1" name=""/>
+        <p:cNvGrpSpPr/>
+        <p:nvPr/>
+      </p:nvGrpSpPr>
+      <p:grpSpPr/>
+      <p:sp>
+        <p:nvSpPr>
+          <p:cNvPr id="2" name="TextBox 1"/>
+          <p:cNvSpPr txBox="1"/>
+          <p:nvPr/>
+        </p:nvSpPr>
+        <p:spPr>
+          <a:xfrm>
+            <a:off x="731520" y="457200"/>
+            <a:ext cx="8778240" cy="731520"/>
+          </a:xfrm>
+          <a:prstGeom prst="rect">
+            <a:avLst/>
+          </a:prstGeom>
+          <a:noFill/>
+        </p:spPr>
+        <p:txBody>
+          <a:bodyPr wrap="square">
+            <a:spAutoFit/>
+          </a:bodyPr>
+          <a:lstStyle/>
+          <a:p>
+            <a:pPr algn="l">
+              <a:lnSpc>
+                <a:spcPts val="3600"/>
+              </a:lnSpc>
+            </a:pPr>
+            <a:r>
+              <a:rPr sz="3000" b="1">
+                <a:solidFill>
+                  <a:srgbClr val="1F2D3D"/>
+                </a:solidFill>
+                <a:latin typeface="Microsoft YaHei"/>
+              </a:rPr>
+              <a:t>发现 H：矩阵宽度普适地决定 α regime</a:t>
+            </a:r>
+          </a:p>
+        </p:txBody>
+      </p:sp>
+      <p:sp>
+        <p:nvSpPr>
+          <p:cNvPr id="3" name="TextBox 2"/>
+          <p:cNvSpPr txBox="1"/>
+          <p:nvPr/>
+        </p:nvSpPr>
+        <p:spPr>
+          <a:xfrm>
+            <a:off x="7863840" y="603504"/>
+            <a:ext cx="3840480" cy="457200"/>
+          </a:xfrm>
+          <a:prstGeom prst="rect">
+            <a:avLst/>
+          </a:prstGeom>
+          <a:noFill/>
+        </p:spPr>
+        <p:txBody>
+          <a:bodyPr wrap="square">
+            <a:spAutoFit/>
+          </a:bodyPr>
+          <a:lstStyle/>
+          <a:p>
+            <a:pPr algn="r"/>
+            <a:r>
+              <a:rPr sz="1600" b="0">
+                <a:solidFill>
+                  <a:srgbClr val="1A4F8B"/>
+                </a:solidFill>
+                <a:latin typeface="Microsoft YaHei"/>
+              </a:rPr>
+              <a:t>Dense + MoE 统一</a:t>
+            </a:r>
+          </a:p>
+        </p:txBody>
+      </p:sp>
+      <p:pic>
+        <p:nvPicPr>
+          <p:cNvPr id="4" name="Picture 3" descr="unified_alpha_vs_width.png"/>
+          <p:cNvPicPr>
+            <a:picLocks noChangeAspect="1"/>
+          </p:cNvPicPr>
+          <p:nvPr/>
+        </p:nvPicPr>
+        <p:blipFill>
+          <a:blip r:embed="rId2"/>
+          <a:stretch>
+            <a:fillRect/>
+          </a:stretch>
+        </p:blipFill>
+        <p:spPr>
+          <a:xfrm>
+            <a:off x="457200" y="1371600"/>
+            <a:ext cx="6126480" cy="4251960"/>
+          </a:xfrm>
+          <a:prstGeom prst="rect">
+            <a:avLst/>
+          </a:prstGeom>
+        </p:spPr>
+      </p:pic>
+      <p:sp>
+        <p:nvSpPr>
+          <p:cNvPr id="5" name="Rounded Rectangle 4"/>
+          <p:cNvSpPr/>
+          <p:nvPr/>
+        </p:nvSpPr>
+        <p:spPr>
+          <a:xfrm>
+            <a:off x="6858000" y="1508760"/>
+            <a:ext cx="4572000" cy="731520"/>
+          </a:xfrm>
+          <a:prstGeom prst="roundRect">
+            <a:avLst>
+              <a:gd name="adj" fmla="val 8000"/>
+            </a:avLst>
+          </a:prstGeom>
+          <a:solidFill>
+            <a:srgbClr val="F2F4F7"/>
+          </a:solidFill>
+          <a:ln>
+            <a:noFill/>
+          </a:ln>
+          <a:effectLst/>
+        </p:spPr>
+        <p:style>
+          <a:lnRef idx="1">
+            <a:schemeClr val="accent1"/>
+          </a:lnRef>
+          <a:fillRef idx="3">
+            <a:schemeClr val="accent1"/>
+          </a:fillRef>
+          <a:effectRef idx="2">
+            <a:schemeClr val="accent1"/>
+          </a:effectRef>
+          <a:fontRef idx="minor">
+            <a:schemeClr val="lt1"/>
+          </a:fontRef>
+        </p:style>
+        <p:txBody>
+          <a:bodyPr rtlCol="0" anchor="ctr"/>
+          <a:lstStyle/>
+          <a:p>
+            <a:pPr algn="ctr"/>
+          </a:p>
+        </p:txBody>
+      </p:sp>
+      <p:sp>
+        <p:nvSpPr>
+          <p:cNvPr id="6" name="TextBox 5"/>
+          <p:cNvSpPr txBox="1"/>
+          <p:nvPr/>
+        </p:nvSpPr>
+        <p:spPr>
+          <a:xfrm>
+            <a:off x="6858000" y="1627632"/>
+            <a:ext cx="4572000" cy="457200"/>
+          </a:xfrm>
+          <a:prstGeom prst="rect">
+            <a:avLst/>
+          </a:prstGeom>
+          <a:noFill/>
+        </p:spPr>
+        <p:txBody>
+          <a:bodyPr wrap="square">
+            <a:spAutoFit/>
+          </a:bodyPr>
+          <a:lstStyle/>
+          <a:p>
+            <a:pPr algn="ctr"/>
+            <a:r>
+              <a:rPr sz="1500" b="1">
+                <a:solidFill>
+                  <a:srgbClr val="1F2D3D"/>
+                </a:solidFill>
+                <a:latin typeface="Consolas"/>
+              </a:rPr>
+              <a:t>窄矩阵 → Lévy (α&lt;2)   ·   宽矩阵 → α 4–5</a:t>
+            </a:r>
+          </a:p>
+        </p:txBody>
+      </p:sp>
+      <p:sp>
+        <p:nvSpPr>
+          <p:cNvPr id="7" name="TextBox 6"/>
+          <p:cNvSpPr txBox="1"/>
+          <p:nvPr/>
+        </p:nvSpPr>
+        <p:spPr>
+          <a:xfrm>
+            <a:off x="6858000" y="2514600"/>
+            <a:ext cx="4663440" cy="2194560"/>
+          </a:xfrm>
+          <a:prstGeom prst="rect">
+            <a:avLst/>
+          </a:prstGeom>
+          <a:noFill/>
+        </p:spPr>
+        <p:txBody>
+          <a:bodyPr wrap="square">
+            <a:spAutoFit/>
+          </a:bodyPr>
+          <a:lstStyle/>
+          <a:p>
+            <a:pPr algn="l" marL="285750" indent="-285750">
+              <a:lnSpc>
+                <a:spcPts val="2100"/>
+              </a:lnSpc>
+              <a:buFont typeface="Arial"/>
+              <a:buChar char="•"/>
+            </a:pPr>
+            <a:r>
+              <a:rPr sz="1300" b="0">
+                <a:solidFill>
+                  <a:srgbClr val="4A5A6B"/>
+                </a:solidFill>
+                <a:latin typeface="Microsoft YaHei"/>
+              </a:rPr>
+              <a:t>两个族 </a:t>
+            </a:r>
+            <a:r>
+              <a:rPr sz="1300" b="1">
+                <a:solidFill>
+                  <a:srgbClr val="1F2D3D"/>
+                </a:solidFill>
+                <a:latin typeface="Microsoft YaHei"/>
+              </a:rPr>
+              <a:t>趋势一致</a:t>
+            </a:r>
+            <a:r>
+              <a:rPr sz="1300" b="0">
+                <a:solidFill>
+                  <a:srgbClr val="4A5A6B"/>
+                </a:solidFill>
+                <a:latin typeface="Microsoft YaHei"/>
+              </a:rPr>
+              <a:t>：越宽 → α 越高</a:t>
+            </a:r>
+          </a:p>
+          <a:p>
+            <a:pPr algn="l" marL="285750" indent="-285750">
+              <a:lnSpc>
+                <a:spcPts val="2100"/>
+              </a:lnSpc>
+              <a:buFont typeface="Arial"/>
+              <a:buChar char="•"/>
+            </a:pPr>
+            <a:r>
+              <a:rPr sz="1300" b="0">
+                <a:solidFill>
+                  <a:srgbClr val="4A5A6B"/>
+                </a:solidFill>
+                <a:latin typeface="Microsoft YaHei"/>
+              </a:rPr>
+              <a:t>Dense Pythia：hidden 512→4096 ⇒ attn α 1.6→5.2</a:t>
+            </a:r>
+          </a:p>
+          <a:p>
+            <a:pPr algn="l" marL="285750" indent="-285750">
+              <a:lnSpc>
+                <a:spcPts val="2100"/>
+              </a:lnSpc>
+              <a:buFont typeface="Arial"/>
+              <a:buChar char="•"/>
+            </a:pPr>
+            <a:r>
+              <a:rPr sz="1300" b="0">
+                <a:solidFill>
+                  <a:srgbClr val="4A5A6B"/>
+                </a:solidFill>
+                <a:latin typeface="Microsoft YaHei"/>
+              </a:rPr>
+              <a:t>MoE：expert int 1024→14336 ⇒ α 1.46→4.00</a:t>
+            </a:r>
+          </a:p>
+          <a:p>
+            <a:pPr algn="l" marL="285750" indent="-285750">
+              <a:lnSpc>
+                <a:spcPts val="2100"/>
+              </a:lnSpc>
+              <a:buFont typeface="Arial"/>
+              <a:buChar char="•"/>
+            </a:pPr>
+            <a:r>
+              <a:rPr sz="1300" b="0">
+                <a:solidFill>
+                  <a:srgbClr val="4A5A6B"/>
+                </a:solidFill>
+                <a:latin typeface="Microsoft YaHei"/>
+              </a:rPr>
+              <a:t>α&lt;2 </a:t>
+            </a:r>
+            <a:r>
+              <a:rPr sz="1300" b="1">
+                <a:solidFill>
+                  <a:srgbClr val="2D6A4F"/>
+                </a:solidFill>
+                <a:latin typeface="Microsoft YaHei"/>
+              </a:rPr>
+              <a:t>并非 MoE 独有</a:t>
+            </a:r>
+            <a:r>
+              <a:rPr sz="1300" b="0">
+                <a:solidFill>
+                  <a:srgbClr val="4A5A6B"/>
+                </a:solidFill>
+                <a:latin typeface="Microsoft YaHei"/>
+              </a:rPr>
+              <a:t>——小 dense</a:t>
+            </a:r>
+          </a:p>
+          <a:p>
+            <a:pPr algn="l" marL="285750" indent="-285750">
+              <a:lnSpc>
+                <a:spcPts val="2100"/>
+              </a:lnSpc>
+              <a:buFont typeface="Arial"/>
+              <a:buChar char="•"/>
+            </a:pPr>
+            <a:r>
+              <a:rPr sz="1300" b="0">
+                <a:solidFill>
+                  <a:srgbClr val="4A5A6B"/>
+                </a:solidFill>
+                <a:latin typeface="Microsoft YaHei"/>
+              </a:rPr>
+              <a:t>模型的 attention 同样是重尾的</a:t>
+            </a:r>
+          </a:p>
+        </p:txBody>
+      </p:sp>
+      <p:sp>
+        <p:nvSpPr>
+          <p:cNvPr id="8" name="Rounded Rectangle 7"/>
+          <p:cNvSpPr/>
+          <p:nvPr/>
+        </p:nvSpPr>
+        <p:spPr>
+          <a:xfrm>
+            <a:off x="6858000" y="4709160"/>
+            <a:ext cx="4617720" cy="914400"/>
+          </a:xfrm>
+          <a:prstGeom prst="roundRect">
+            <a:avLst>
+              <a:gd name="adj" fmla="val 8000"/>
+            </a:avLst>
+          </a:prstGeom>
+          <a:solidFill>
+            <a:srgbClr val="E6F0EB"/>
+          </a:solidFill>
+          <a:ln>
+            <a:noFill/>
+          </a:ln>
+          <a:effectLst/>
+        </p:spPr>
+        <p:style>
+          <a:lnRef idx="1">
+            <a:schemeClr val="accent1"/>
+          </a:lnRef>
+          <a:fillRef idx="3">
+            <a:schemeClr val="accent1"/>
+          </a:fillRef>
+          <a:effectRef idx="2">
+            <a:schemeClr val="accent1"/>
+          </a:effectRef>
+          <a:fontRef idx="minor">
+            <a:schemeClr val="lt1"/>
+          </a:fontRef>
+        </p:style>
+        <p:txBody>
+          <a:bodyPr rtlCol="0" anchor="ctr"/>
+          <a:lstStyle/>
+          <a:p>
+            <a:pPr algn="ctr"/>
+          </a:p>
+        </p:txBody>
+      </p:sp>
+      <p:sp>
+        <p:nvSpPr>
+          <p:cNvPr id="9" name="TextBox 8"/>
+          <p:cNvSpPr txBox="1"/>
+          <p:nvPr/>
+        </p:nvSpPr>
+        <p:spPr>
+          <a:xfrm>
+            <a:off x="6995160" y="4846320"/>
+            <a:ext cx="4343400" cy="685800"/>
+          </a:xfrm>
+          <a:prstGeom prst="rect">
+            <a:avLst/>
+          </a:prstGeom>
+          <a:noFill/>
+        </p:spPr>
+        <p:txBody>
+          <a:bodyPr wrap="square" anchor="ctr">
+            <a:spAutoFit/>
+          </a:bodyPr>
+          <a:lstStyle/>
+          <a:p>
+            <a:pPr algn="l">
+              <a:lnSpc>
+                <a:spcPts val="1800"/>
+              </a:lnSpc>
+            </a:pPr>
+            <a:r>
+              <a:rPr sz="1300" b="0">
+                <a:solidFill>
+                  <a:srgbClr val="1F2D3D"/>
+                </a:solidFill>
+                <a:latin typeface="Microsoft YaHei"/>
+              </a:rPr>
+              <a:t>α regime 由 </a:t>
+            </a:r>
+            <a:r>
+              <a:rPr sz="1300" b="1">
+                <a:solidFill>
+                  <a:srgbClr val="2D6A4F"/>
+                </a:solidFill>
+                <a:latin typeface="Microsoft YaHei"/>
+              </a:rPr>
+              <a:t>单矩阵宽度</a:t>
+            </a:r>
+            <a:r>
+              <a:rPr sz="1300" b="0">
+                <a:solidFill>
+                  <a:srgbClr val="1F2D3D"/>
+                </a:solidFill>
+                <a:latin typeface="Microsoft YaHei"/>
+              </a:rPr>
+              <a:t> 决定，</a:t>
+            </a:r>
+          </a:p>
+          <a:p>
+            <a:pPr algn="l">
+              <a:lnSpc>
+                <a:spcPts val="1800"/>
+              </a:lnSpc>
+            </a:pPr>
+            <a:r>
+              <a:rPr sz="1300" b="0">
+                <a:solidFill>
+                  <a:srgbClr val="1F2D3D"/>
+                </a:solidFill>
+                <a:latin typeface="Microsoft YaHei"/>
+              </a:rPr>
+              <a:t>而非 MoE/dense 之分 —— 一个统一的调节旋钮。</a:t>
+            </a:r>
+          </a:p>
+        </p:txBody>
+      </p:sp>
+      <p:sp>
+        <p:nvSpPr>
+          <p:cNvPr id="10" name="TextBox 9"/>
+          <p:cNvSpPr txBox="1"/>
+          <p:nvPr/>
+        </p:nvSpPr>
+        <p:spPr>
+          <a:xfrm>
+            <a:off x="11155680" y="6400800"/>
+            <a:ext cx="914400" cy="365760"/>
+          </a:xfrm>
+          <a:prstGeom prst="rect">
+            <a:avLst/>
+          </a:prstGeom>
+          <a:noFill/>
+        </p:spPr>
+        <p:txBody>
+          <a:bodyPr wrap="square">
+            <a:spAutoFit/>
+          </a:bodyPr>
+          <a:lstStyle/>
+          <a:p>
+            <a:pPr algn="r"/>
+            <a:r>
+              <a:rPr sz="1100" b="0">
+                <a:solidFill>
+                  <a:srgbClr val="6B7B8D"/>
+                </a:solidFill>
+                <a:latin typeface="Consolas"/>
+              </a:rPr>
+              <a:t>10 / 10</a:t>
             </a:r>
           </a:p>
         </p:txBody>
@@ -4419,7 +4930,7 @@
                 </a:solidFill>
                 <a:latin typeface="Consolas"/>
               </a:rPr>
-              <a:t>02 / 7</a:t>
+              <a:t>02 / 10</a:t>
             </a:r>
           </a:p>
         </p:txBody>
@@ -4801,7 +5312,7 @@
                 </a:solidFill>
                 <a:latin typeface="Consolas"/>
               </a:rPr>
-              <a:t>03 / 7</a:t>
+              <a:t>03 / 10</a:t>
             </a:r>
           </a:p>
         </p:txBody>
@@ -5282,7 +5793,7 @@
                 </a:solidFill>
                 <a:latin typeface="Consolas"/>
               </a:rPr>
-              <a:t>04 / 7</a:t>
+              <a:t>04 / 10</a:t>
             </a:r>
           </a:p>
         </p:txBody>
@@ -5682,7 +6193,7 @@
                 </a:solidFill>
                 <a:latin typeface="Consolas"/>
               </a:rPr>
-              <a:t>05 / 7</a:t>
+              <a:t>05 / 10</a:t>
             </a:r>
           </a:p>
         </p:txBody>
@@ -6091,7 +6602,7 @@
                 </a:solidFill>
                 <a:latin typeface="Consolas"/>
               </a:rPr>
-              <a:t>06 / 7</a:t>
+              <a:t>06 / 10</a:t>
             </a:r>
           </a:p>
         </p:txBody>
@@ -6644,7 +7155,978 @@
                 </a:solidFill>
                 <a:latin typeface="Consolas"/>
               </a:rPr>
-              <a:t>07 / 7</a:t>
+              <a:t>07 / 10</a:t>
+            </a:r>
+          </a:p>
+        </p:txBody>
+      </p:sp>
+    </p:spTree>
+  </p:cSld>
+  <p:clrMapOvr>
+    <a:masterClrMapping/>
+  </p:clrMapOvr>
+</p:sld>
+</file>
+
+<file path=ppt/slides/slide8.xml><?xml version="1.0" encoding="utf-8"?>
+<p:sld xmlns:a="http://schemas.openxmlformats.org/drawingml/2006/main" xmlns:p="http://schemas.openxmlformats.org/presentationml/2006/main" xmlns:r="http://schemas.openxmlformats.org/officeDocument/2006/relationships">
+  <p:cSld>
+    <p:bg>
+      <p:bgPr>
+        <a:solidFill>
+          <a:srgbClr val="F7F8FA"/>
+        </a:solidFill>
+        <a:effectLst/>
+      </p:bgPr>
+    </p:bg>
+    <p:spTree>
+      <p:nvGrpSpPr>
+        <p:cNvPr id="1" name=""/>
+        <p:cNvGrpSpPr/>
+        <p:nvPr/>
+      </p:nvGrpSpPr>
+      <p:grpSpPr/>
+      <p:sp>
+        <p:nvSpPr>
+          <p:cNvPr id="2" name="TextBox 1"/>
+          <p:cNvSpPr txBox="1"/>
+          <p:nvPr/>
+        </p:nvSpPr>
+        <p:spPr>
+          <a:xfrm>
+            <a:off x="731520" y="457200"/>
+            <a:ext cx="8778240" cy="731520"/>
+          </a:xfrm>
+          <a:prstGeom prst="rect">
+            <a:avLst/>
+          </a:prstGeom>
+          <a:noFill/>
+        </p:spPr>
+        <p:txBody>
+          <a:bodyPr wrap="square">
+            <a:spAutoFit/>
+          </a:bodyPr>
+          <a:lstStyle/>
+          <a:p>
+            <a:pPr algn="l">
+              <a:lnSpc>
+                <a:spcPts val="3600"/>
+              </a:lnSpc>
+            </a:pPr>
+            <a:r>
+              <a:rPr sz="3000" b="1">
+                <a:solidFill>
+                  <a:srgbClr val="1F2D3D"/>
+                </a:solidFill>
+                <a:latin typeface="Microsoft YaHei"/>
+              </a:rPr>
+              <a:t>发现 F：排序一致，整体下移至 Lévy 区</a:t>
+            </a:r>
+          </a:p>
+        </p:txBody>
+      </p:sp>
+      <p:sp>
+        <p:nvSpPr>
+          <p:cNvPr id="3" name="TextBox 2"/>
+          <p:cNvSpPr txBox="1"/>
+          <p:nvPr/>
+        </p:nvSpPr>
+        <p:spPr>
+          <a:xfrm>
+            <a:off x="7863840" y="603504"/>
+            <a:ext cx="3840480" cy="457200"/>
+          </a:xfrm>
+          <a:prstGeom prst="rect">
+            <a:avLst/>
+          </a:prstGeom>
+          <a:noFill/>
+        </p:spPr>
+        <p:txBody>
+          <a:bodyPr wrap="square">
+            <a:spAutoFit/>
+          </a:bodyPr>
+          <a:lstStyle/>
+          <a:p>
+            <a:pPr algn="r"/>
+            <a:r>
+              <a:rPr sz="1600" b="0">
+                <a:solidFill>
+                  <a:srgbClr val="1A4F8B"/>
+                </a:solidFill>
+                <a:latin typeface="Microsoft YaHei"/>
+              </a:rPr>
+              <a:t>逐层分解</a:t>
+            </a:r>
+          </a:p>
+        </p:txBody>
+      </p:sp>
+      <p:pic>
+        <p:nvPicPr>
+          <p:cNvPr id="4" name="Picture 3" descr="dense_vs_moe_attn_ffn.png"/>
+          <p:cNvPicPr>
+            <a:picLocks noChangeAspect="1"/>
+          </p:cNvPicPr>
+          <p:nvPr/>
+        </p:nvPicPr>
+        <p:blipFill>
+          <a:blip r:embed="rId2"/>
+          <a:stretch>
+            <a:fillRect/>
+          </a:stretch>
+        </p:blipFill>
+        <p:spPr>
+          <a:xfrm>
+            <a:off x="457200" y="1371600"/>
+            <a:ext cx="6126480" cy="4251960"/>
+          </a:xfrm>
+          <a:prstGeom prst="rect">
+            <a:avLst/>
+          </a:prstGeom>
+        </p:spPr>
+      </p:pic>
+      <p:sp>
+        <p:nvSpPr>
+          <p:cNvPr id="5" name="Rounded Rectangle 4"/>
+          <p:cNvSpPr/>
+          <p:nvPr/>
+        </p:nvSpPr>
+        <p:spPr>
+          <a:xfrm>
+            <a:off x="6858000" y="1508760"/>
+            <a:ext cx="4572000" cy="731520"/>
+          </a:xfrm>
+          <a:prstGeom prst="roundRect">
+            <a:avLst>
+              <a:gd name="adj" fmla="val 8000"/>
+            </a:avLst>
+          </a:prstGeom>
+          <a:solidFill>
+            <a:srgbClr val="F2F4F7"/>
+          </a:solidFill>
+          <a:ln>
+            <a:noFill/>
+          </a:ln>
+          <a:effectLst/>
+        </p:spPr>
+        <p:style>
+          <a:lnRef idx="1">
+            <a:schemeClr val="accent1"/>
+          </a:lnRef>
+          <a:fillRef idx="3">
+            <a:schemeClr val="accent1"/>
+          </a:fillRef>
+          <a:effectRef idx="2">
+            <a:schemeClr val="accent1"/>
+          </a:effectRef>
+          <a:fontRef idx="minor">
+            <a:schemeClr val="lt1"/>
+          </a:fontRef>
+        </p:style>
+        <p:txBody>
+          <a:bodyPr rtlCol="0" anchor="ctr"/>
+          <a:lstStyle/>
+          <a:p>
+            <a:pPr algn="ctr"/>
+          </a:p>
+        </p:txBody>
+      </p:sp>
+      <p:sp>
+        <p:nvSpPr>
+          <p:cNvPr id="6" name="TextBox 5"/>
+          <p:cNvSpPr txBox="1"/>
+          <p:nvPr/>
+        </p:nvSpPr>
+        <p:spPr>
+          <a:xfrm>
+            <a:off x="6858000" y="1627632"/>
+            <a:ext cx="4572000" cy="457200"/>
+          </a:xfrm>
+          <a:prstGeom prst="rect">
+            <a:avLst/>
+          </a:prstGeom>
+          <a:noFill/>
+        </p:spPr>
+        <p:txBody>
+          <a:bodyPr wrap="square">
+            <a:spAutoFit/>
+          </a:bodyPr>
+          <a:lstStyle/>
+          <a:p>
+            <a:pPr algn="ctr"/>
+            <a:r>
+              <a:rPr sz="1500" b="1">
+                <a:solidFill>
+                  <a:srgbClr val="1F2D3D"/>
+                </a:solidFill>
+                <a:latin typeface="Consolas"/>
+              </a:rPr>
+              <a:t>两者都是 FFN &gt; attn；gap Δα 1.26 → 0.41</a:t>
+            </a:r>
+          </a:p>
+        </p:txBody>
+      </p:sp>
+      <p:sp>
+        <p:nvSpPr>
+          <p:cNvPr id="7" name="TextBox 6"/>
+          <p:cNvSpPr txBox="1"/>
+          <p:nvPr/>
+        </p:nvSpPr>
+        <p:spPr>
+          <a:xfrm>
+            <a:off x="6858000" y="2514600"/>
+            <a:ext cx="4663440" cy="2194560"/>
+          </a:xfrm>
+          <a:prstGeom prst="rect">
+            <a:avLst/>
+          </a:prstGeom>
+          <a:noFill/>
+        </p:spPr>
+        <p:txBody>
+          <a:bodyPr wrap="square">
+            <a:spAutoFit/>
+          </a:bodyPr>
+          <a:lstStyle/>
+          <a:p>
+            <a:pPr algn="l" marL="285750" indent="-285750">
+              <a:lnSpc>
+                <a:spcPts val="2100"/>
+              </a:lnSpc>
+              <a:buFont typeface="Arial"/>
+              <a:buChar char="•"/>
+            </a:pPr>
+            <a:r>
+              <a:rPr sz="1300" b="0">
+                <a:solidFill>
+                  <a:srgbClr val="4A5A6B"/>
+                </a:solidFill>
+                <a:latin typeface="Microsoft YaHei"/>
+              </a:rPr>
+              <a:t>排序保持不变：</a:t>
+            </a:r>
+            <a:r>
+              <a:rPr sz="1300" b="1">
+                <a:solidFill>
+                  <a:srgbClr val="1F2D3D"/>
+                </a:solidFill>
+                <a:latin typeface="Microsoft YaHei"/>
+              </a:rPr>
+              <a:t>FFN α &gt; attn α</a:t>
+            </a:r>
+            <a:r>
+              <a:rPr sz="1300" b="0">
+                <a:solidFill>
+                  <a:srgbClr val="4A5A6B"/>
+                </a:solidFill>
+                <a:latin typeface="Microsoft YaHei"/>
+              </a:rPr>
+              <a:t>（两者皆然）</a:t>
+            </a:r>
+          </a:p>
+          <a:p>
+            <a:pPr algn="l" marL="285750" indent="-285750">
+              <a:lnSpc>
+                <a:spcPts val="2100"/>
+              </a:lnSpc>
+              <a:buFont typeface="Arial"/>
+              <a:buChar char="•"/>
+            </a:pPr>
+            <a:r>
+              <a:rPr sz="1300" b="0">
+                <a:solidFill>
+                  <a:srgbClr val="4A5A6B"/>
+                </a:solidFill>
+                <a:latin typeface="Microsoft YaHei"/>
+              </a:rPr>
+              <a:t>（Dense：MLP 3.34 &gt; attn 2.08；MoE：1.62 &gt; 1.21）</a:t>
+            </a:r>
+          </a:p>
+          <a:p>
+            <a:pPr algn="l" marL="285750" indent="-285750">
+              <a:lnSpc>
+                <a:spcPts val="2100"/>
+              </a:lnSpc>
+              <a:buFont typeface="Arial"/>
+              <a:buChar char="•"/>
+            </a:pPr>
+            <a:r>
+              <a:rPr sz="1300" b="0">
+                <a:solidFill>
+                  <a:srgbClr val="4A5A6B"/>
+                </a:solidFill>
+                <a:latin typeface="Microsoft YaHei"/>
+              </a:rPr>
+              <a:t>但 MoE 把 </a:t>
+            </a:r>
+            <a:r>
+              <a:rPr sz="1300" b="1">
+                <a:solidFill>
+                  <a:srgbClr val="2D6A4F"/>
+                </a:solidFill>
+                <a:latin typeface="Microsoft YaHei"/>
+              </a:rPr>
+              <a:t>每个组件都压到 α&lt;2</a:t>
+            </a:r>
+          </a:p>
+          <a:p>
+            <a:pPr algn="l" marL="285750" indent="-285750">
+              <a:lnSpc>
+                <a:spcPts val="2100"/>
+              </a:lnSpc>
+              <a:buFont typeface="Arial"/>
+              <a:buChar char="•"/>
+            </a:pPr>
+            <a:r>
+              <a:rPr sz="1300" b="0">
+                <a:solidFill>
+                  <a:srgbClr val="4A5A6B"/>
+                </a:solidFill>
+                <a:latin typeface="Microsoft YaHei"/>
+              </a:rPr>
+              <a:t>且 attn–FFN 的差距缩小（1.26 → 0.41）</a:t>
+            </a:r>
+          </a:p>
+          <a:p>
+            <a:pPr algn="l" marL="285750" indent="-285750">
+              <a:lnSpc>
+                <a:spcPts val="2100"/>
+              </a:lnSpc>
+              <a:buFont typeface="Arial"/>
+              <a:buChar char="•"/>
+            </a:pPr>
+            <a:r>
+              <a:rPr sz="1300" b="0">
+                <a:solidFill>
+                  <a:srgbClr val="4A5A6B"/>
+                </a:solidFill>
+                <a:latin typeface="Microsoft YaHei"/>
+              </a:rPr>
+              <a:t>attn 内部：q/k（α≈1.1）&lt; v/o（α≈1.27）</a:t>
+            </a:r>
+          </a:p>
+        </p:txBody>
+      </p:sp>
+      <p:sp>
+        <p:nvSpPr>
+          <p:cNvPr id="8" name="Rounded Rectangle 7"/>
+          <p:cNvSpPr/>
+          <p:nvPr/>
+        </p:nvSpPr>
+        <p:spPr>
+          <a:xfrm>
+            <a:off x="6858000" y="4709160"/>
+            <a:ext cx="4617720" cy="914400"/>
+          </a:xfrm>
+          <a:prstGeom prst="roundRect">
+            <a:avLst>
+              <a:gd name="adj" fmla="val 8000"/>
+            </a:avLst>
+          </a:prstGeom>
+          <a:solidFill>
+            <a:srgbClr val="E8EFF7"/>
+          </a:solidFill>
+          <a:ln>
+            <a:noFill/>
+          </a:ln>
+          <a:effectLst/>
+        </p:spPr>
+        <p:style>
+          <a:lnRef idx="1">
+            <a:schemeClr val="accent1"/>
+          </a:lnRef>
+          <a:fillRef idx="3">
+            <a:schemeClr val="accent1"/>
+          </a:fillRef>
+          <a:effectRef idx="2">
+            <a:schemeClr val="accent1"/>
+          </a:effectRef>
+          <a:fontRef idx="minor">
+            <a:schemeClr val="lt1"/>
+          </a:fontRef>
+        </p:style>
+        <p:txBody>
+          <a:bodyPr rtlCol="0" anchor="ctr"/>
+          <a:lstStyle/>
+          <a:p>
+            <a:pPr algn="ctr"/>
+          </a:p>
+        </p:txBody>
+      </p:sp>
+      <p:sp>
+        <p:nvSpPr>
+          <p:cNvPr id="9" name="TextBox 8"/>
+          <p:cNvSpPr txBox="1"/>
+          <p:nvPr/>
+        </p:nvSpPr>
+        <p:spPr>
+          <a:xfrm>
+            <a:off x="6995160" y="4846320"/>
+            <a:ext cx="4343400" cy="685800"/>
+          </a:xfrm>
+          <a:prstGeom prst="rect">
+            <a:avLst/>
+          </a:prstGeom>
+          <a:noFill/>
+        </p:spPr>
+        <p:txBody>
+          <a:bodyPr wrap="square" anchor="ctr">
+            <a:spAutoFit/>
+          </a:bodyPr>
+          <a:lstStyle/>
+          <a:p>
+            <a:pPr algn="l">
+              <a:lnSpc>
+                <a:spcPts val="1800"/>
+              </a:lnSpc>
+            </a:pPr>
+            <a:r>
+              <a:rPr sz="1300" b="0">
+                <a:solidFill>
+                  <a:srgbClr val="1F2D3D"/>
+                </a:solidFill>
+                <a:latin typeface="Microsoft YaHei"/>
+              </a:rPr>
+              <a:t>MoE 并未反转层次结构 —— 而是把</a:t>
+            </a:r>
+            <a:r>
+              <a:rPr sz="1300" b="1">
+                <a:solidFill>
+                  <a:srgbClr val="2D6A4F"/>
+                </a:solidFill>
+                <a:latin typeface="Microsoft YaHei"/>
+              </a:rPr>
+              <a:t>所有组件</a:t>
+            </a:r>
+          </a:p>
+          <a:p>
+            <a:pPr algn="l">
+              <a:lnSpc>
+                <a:spcPts val="1800"/>
+              </a:lnSpc>
+            </a:pPr>
+            <a:r>
+              <a:rPr sz="1300" b="0">
+                <a:solidFill>
+                  <a:srgbClr val="1F2D3D"/>
+                </a:solidFill>
+                <a:latin typeface="Microsoft YaHei"/>
+              </a:rPr>
+              <a:t>压缩进重尾的 Lévy 区间。</a:t>
+            </a:r>
+          </a:p>
+        </p:txBody>
+      </p:sp>
+      <p:sp>
+        <p:nvSpPr>
+          <p:cNvPr id="10" name="TextBox 9"/>
+          <p:cNvSpPr txBox="1"/>
+          <p:nvPr/>
+        </p:nvSpPr>
+        <p:spPr>
+          <a:xfrm>
+            <a:off x="11155680" y="6400800"/>
+            <a:ext cx="914400" cy="365760"/>
+          </a:xfrm>
+          <a:prstGeom prst="rect">
+            <a:avLst/>
+          </a:prstGeom>
+          <a:noFill/>
+        </p:spPr>
+        <p:txBody>
+          <a:bodyPr wrap="square">
+            <a:spAutoFit/>
+          </a:bodyPr>
+          <a:lstStyle/>
+          <a:p>
+            <a:pPr algn="r"/>
+            <a:r>
+              <a:rPr sz="1100" b="0">
+                <a:solidFill>
+                  <a:srgbClr val="6B7B8D"/>
+                </a:solidFill>
+                <a:latin typeface="Consolas"/>
+              </a:rPr>
+              <a:t>08 / 10</a:t>
+            </a:r>
+          </a:p>
+        </p:txBody>
+      </p:sp>
+    </p:spTree>
+  </p:cSld>
+  <p:clrMapOvr>
+    <a:masterClrMapping/>
+  </p:clrMapOvr>
+</p:sld>
+</file>
+
+<file path=ppt/slides/slide9.xml><?xml version="1.0" encoding="utf-8"?>
+<p:sld xmlns:a="http://schemas.openxmlformats.org/drawingml/2006/main" xmlns:p="http://schemas.openxmlformats.org/presentationml/2006/main" xmlns:r="http://schemas.openxmlformats.org/officeDocument/2006/relationships">
+  <p:cSld>
+    <p:bg>
+      <p:bgPr>
+        <a:solidFill>
+          <a:srgbClr val="F7F8FA"/>
+        </a:solidFill>
+        <a:effectLst/>
+      </p:bgPr>
+    </p:bg>
+    <p:spTree>
+      <p:nvGrpSpPr>
+        <p:cNvPr id="1" name=""/>
+        <p:cNvGrpSpPr/>
+        <p:nvPr/>
+      </p:nvGrpSpPr>
+      <p:grpSpPr/>
+      <p:sp>
+        <p:nvSpPr>
+          <p:cNvPr id="2" name="TextBox 1"/>
+          <p:cNvSpPr txBox="1"/>
+          <p:nvPr/>
+        </p:nvSpPr>
+        <p:spPr>
+          <a:xfrm>
+            <a:off x="731520" y="457200"/>
+            <a:ext cx="8778240" cy="731520"/>
+          </a:xfrm>
+          <a:prstGeom prst="rect">
+            <a:avLst/>
+          </a:prstGeom>
+          <a:noFill/>
+        </p:spPr>
+        <p:txBody>
+          <a:bodyPr wrap="square">
+            <a:spAutoFit/>
+          </a:bodyPr>
+          <a:lstStyle/>
+          <a:p>
+            <a:pPr algn="l">
+              <a:lnSpc>
+                <a:spcPts val="3600"/>
+              </a:lnSpc>
+            </a:pPr>
+            <a:r>
+              <a:rPr sz="3000" b="1">
+                <a:solidFill>
+                  <a:srgbClr val="1F2D3D"/>
+                </a:solidFill>
+                <a:latin typeface="Microsoft YaHei"/>
+              </a:rPr>
+              <a:t>发现 G：专家越少，特化越强</a:t>
+            </a:r>
+          </a:p>
+        </p:txBody>
+      </p:sp>
+      <p:sp>
+        <p:nvSpPr>
+          <p:cNvPr id="3" name="TextBox 2"/>
+          <p:cNvSpPr txBox="1"/>
+          <p:nvPr/>
+        </p:nvSpPr>
+        <p:spPr>
+          <a:xfrm>
+            <a:off x="7863840" y="603504"/>
+            <a:ext cx="3840480" cy="457200"/>
+          </a:xfrm>
+          <a:prstGeom prst="rect">
+            <a:avLst/>
+          </a:prstGeom>
+          <a:noFill/>
+        </p:spPr>
+        <p:txBody>
+          <a:bodyPr wrap="square">
+            <a:spAutoFit/>
+          </a:bodyPr>
+          <a:lstStyle/>
+          <a:p>
+            <a:pPr algn="r"/>
+            <a:r>
+              <a:rPr sz="1600" b="0">
+                <a:solidFill>
+                  <a:srgbClr val="1A4F8B"/>
+                </a:solidFill>
+                <a:latin typeface="Microsoft YaHei"/>
+              </a:rPr>
+              <a:t>逐专家差异</a:t>
+            </a:r>
+          </a:p>
+        </p:txBody>
+      </p:sp>
+      <p:pic>
+        <p:nvPicPr>
+          <p:cNvPr id="4" name="Picture 3" descr="moe_spread_compare.png"/>
+          <p:cNvPicPr>
+            <a:picLocks noChangeAspect="1"/>
+          </p:cNvPicPr>
+          <p:nvPr/>
+        </p:nvPicPr>
+        <p:blipFill>
+          <a:blip r:embed="rId2"/>
+          <a:stretch>
+            <a:fillRect/>
+          </a:stretch>
+        </p:blipFill>
+        <p:spPr>
+          <a:xfrm>
+            <a:off x="457200" y="1371600"/>
+            <a:ext cx="6126480" cy="4251960"/>
+          </a:xfrm>
+          <a:prstGeom prst="rect">
+            <a:avLst/>
+          </a:prstGeom>
+        </p:spPr>
+      </p:pic>
+      <p:sp>
+        <p:nvSpPr>
+          <p:cNvPr id="5" name="Rounded Rectangle 4"/>
+          <p:cNvSpPr/>
+          <p:nvPr/>
+        </p:nvSpPr>
+        <p:spPr>
+          <a:xfrm>
+            <a:off x="6858000" y="1508760"/>
+            <a:ext cx="4572000" cy="731520"/>
+          </a:xfrm>
+          <a:prstGeom prst="roundRect">
+            <a:avLst>
+              <a:gd name="adj" fmla="val 8000"/>
+            </a:avLst>
+          </a:prstGeom>
+          <a:solidFill>
+            <a:srgbClr val="F2F4F7"/>
+          </a:solidFill>
+          <a:ln>
+            <a:noFill/>
+          </a:ln>
+          <a:effectLst/>
+        </p:spPr>
+        <p:style>
+          <a:lnRef idx="1">
+            <a:schemeClr val="accent1"/>
+          </a:lnRef>
+          <a:fillRef idx="3">
+            <a:schemeClr val="accent1"/>
+          </a:fillRef>
+          <a:effectRef idx="2">
+            <a:schemeClr val="accent1"/>
+          </a:effectRef>
+          <a:fontRef idx="minor">
+            <a:schemeClr val="lt1"/>
+          </a:fontRef>
+        </p:style>
+        <p:txBody>
+          <a:bodyPr rtlCol="0" anchor="ctr"/>
+          <a:lstStyle/>
+          <a:p>
+            <a:pPr algn="ctr"/>
+          </a:p>
+        </p:txBody>
+      </p:sp>
+      <p:sp>
+        <p:nvSpPr>
+          <p:cNvPr id="6" name="TextBox 5"/>
+          <p:cNvSpPr txBox="1"/>
+          <p:nvPr/>
+        </p:nvSpPr>
+        <p:spPr>
+          <a:xfrm>
+            <a:off x="6858000" y="1627632"/>
+            <a:ext cx="4572000" cy="457200"/>
+          </a:xfrm>
+          <a:prstGeom prst="rect">
+            <a:avLst/>
+          </a:prstGeom>
+          <a:noFill/>
+        </p:spPr>
+        <p:txBody>
+          <a:bodyPr wrap="square">
+            <a:spAutoFit/>
+          </a:bodyPr>
+          <a:lstStyle/>
+          <a:p>
+            <a:pPr algn="ctr"/>
+            <a:r>
+              <a:rPr sz="1500" b="1">
+                <a:solidFill>
+                  <a:srgbClr val="1F2D3D"/>
+                </a:solidFill>
+                <a:latin typeface="Consolas"/>
+              </a:rPr>
+              <a:t>OLMoE σ(α)=0.02   vs   Mixtral σ(α)=0.85</a:t>
+            </a:r>
+          </a:p>
+        </p:txBody>
+      </p:sp>
+      <p:sp>
+        <p:nvSpPr>
+          <p:cNvPr id="7" name="TextBox 6"/>
+          <p:cNvSpPr txBox="1"/>
+          <p:nvPr/>
+        </p:nvSpPr>
+        <p:spPr>
+          <a:xfrm>
+            <a:off x="6858000" y="2514600"/>
+            <a:ext cx="4663440" cy="2194560"/>
+          </a:xfrm>
+          <a:prstGeom prst="rect">
+            <a:avLst/>
+          </a:prstGeom>
+          <a:noFill/>
+        </p:spPr>
+        <p:txBody>
+          <a:bodyPr wrap="square">
+            <a:spAutoFit/>
+          </a:bodyPr>
+          <a:lstStyle/>
+          <a:p>
+            <a:pPr algn="l" marL="285750" indent="-285750">
+              <a:lnSpc>
+                <a:spcPts val="2100"/>
+              </a:lnSpc>
+              <a:buFont typeface="Arial"/>
+              <a:buChar char="•"/>
+            </a:pPr>
+            <a:r>
+              <a:rPr sz="1300" b="0">
+                <a:solidFill>
+                  <a:srgbClr val="4A5A6B"/>
+                </a:solidFill>
+                <a:latin typeface="Microsoft YaHei"/>
+              </a:rPr>
+              <a:t>OLMoE（64 专家）：各专家谱性质 </a:t>
+            </a:r>
+            <a:r>
+              <a:rPr sz="1300" b="1">
+                <a:solidFill>
+                  <a:srgbClr val="1A4F8B"/>
+                </a:solidFill>
+                <a:latin typeface="Microsoft YaHei"/>
+              </a:rPr>
+              <a:t>近乎相同</a:t>
+            </a:r>
+          </a:p>
+          <a:p>
+            <a:pPr algn="l" marL="285750" indent="-285750">
+              <a:lnSpc>
+                <a:spcPts val="2100"/>
+              </a:lnSpc>
+              <a:buFont typeface="Arial"/>
+              <a:buChar char="•"/>
+            </a:pPr>
+            <a:r>
+              <a:rPr sz="1300" b="0">
+                <a:solidFill>
+                  <a:srgbClr val="4A5A6B"/>
+                </a:solidFill>
+                <a:latin typeface="Microsoft YaHei"/>
+              </a:rPr>
+              <a:t>—— 细粒度 MoE 趋向同质化</a:t>
+            </a:r>
+          </a:p>
+          <a:p>
+            <a:pPr algn="l" marL="285750" indent="-285750">
+              <a:lnSpc>
+                <a:spcPts val="2100"/>
+              </a:lnSpc>
+              <a:buFont typeface="Arial"/>
+              <a:buChar char="•"/>
+            </a:pPr>
+            <a:r>
+              <a:rPr sz="1300" b="0">
+                <a:solidFill>
+                  <a:srgbClr val="4A5A6B"/>
+                </a:solidFill>
+                <a:latin typeface="Microsoft YaHei"/>
+              </a:rPr>
+              <a:t>Mixtral（8 专家）：α 跨度 2.5–6.5 ——</a:t>
+            </a:r>
+          </a:p>
+          <a:p>
+            <a:pPr algn="l" marL="285750" indent="-285750">
+              <a:lnSpc>
+                <a:spcPts val="2100"/>
+              </a:lnSpc>
+              <a:buFont typeface="Arial"/>
+              <a:buChar char="•"/>
+            </a:pPr>
+            <a:r>
+              <a:rPr sz="1300" b="0">
+                <a:solidFill>
+                  <a:srgbClr val="4A5A6B"/>
+                </a:solidFill>
+                <a:latin typeface="Microsoft YaHei"/>
+              </a:rPr>
+              <a:t>粗粒度 MoE 驱动强烈特化</a:t>
+            </a:r>
+          </a:p>
+          <a:p>
+            <a:pPr algn="l" marL="285750" indent="-285750">
+              <a:lnSpc>
+                <a:spcPts val="2100"/>
+              </a:lnSpc>
+              <a:buFont typeface="Arial"/>
+              <a:buChar char="•"/>
+            </a:pPr>
+            <a:r>
+              <a:rPr sz="1300" b="0">
+                <a:solidFill>
+                  <a:srgbClr val="4A5A6B"/>
+                </a:solidFill>
+                <a:latin typeface="Microsoft YaHei"/>
+              </a:rPr>
+              <a:t>Mixtral FFN α 随深度升高（→6），类似 dense</a:t>
+            </a:r>
+          </a:p>
+        </p:txBody>
+      </p:sp>
+      <p:sp>
+        <p:nvSpPr>
+          <p:cNvPr id="8" name="Rounded Rectangle 7"/>
+          <p:cNvSpPr/>
+          <p:nvPr/>
+        </p:nvSpPr>
+        <p:spPr>
+          <a:xfrm>
+            <a:off x="6858000" y="4709160"/>
+            <a:ext cx="4617720" cy="914400"/>
+          </a:xfrm>
+          <a:prstGeom prst="roundRect">
+            <a:avLst>
+              <a:gd name="adj" fmla="val 8000"/>
+            </a:avLst>
+          </a:prstGeom>
+          <a:solidFill>
+            <a:srgbClr val="E6F0EB"/>
+          </a:solidFill>
+          <a:ln>
+            <a:noFill/>
+          </a:ln>
+          <a:effectLst/>
+        </p:spPr>
+        <p:style>
+          <a:lnRef idx="1">
+            <a:schemeClr val="accent1"/>
+          </a:lnRef>
+          <a:fillRef idx="3">
+            <a:schemeClr val="accent1"/>
+          </a:fillRef>
+          <a:effectRef idx="2">
+            <a:schemeClr val="accent1"/>
+          </a:effectRef>
+          <a:fontRef idx="minor">
+            <a:schemeClr val="lt1"/>
+          </a:fontRef>
+        </p:style>
+        <p:txBody>
+          <a:bodyPr rtlCol="0" anchor="ctr"/>
+          <a:lstStyle/>
+          <a:p>
+            <a:pPr algn="ctr"/>
+          </a:p>
+        </p:txBody>
+      </p:sp>
+      <p:sp>
+        <p:nvSpPr>
+          <p:cNvPr id="9" name="TextBox 8"/>
+          <p:cNvSpPr txBox="1"/>
+          <p:nvPr/>
+        </p:nvSpPr>
+        <p:spPr>
+          <a:xfrm>
+            <a:off x="6995160" y="4846320"/>
+            <a:ext cx="4343400" cy="685800"/>
+          </a:xfrm>
+          <a:prstGeom prst="rect">
+            <a:avLst/>
+          </a:prstGeom>
+          <a:noFill/>
+        </p:spPr>
+        <p:txBody>
+          <a:bodyPr wrap="square" anchor="ctr">
+            <a:spAutoFit/>
+          </a:bodyPr>
+          <a:lstStyle/>
+          <a:p>
+            <a:pPr algn="l">
+              <a:lnSpc>
+                <a:spcPts val="1800"/>
+              </a:lnSpc>
+            </a:pPr>
+            <a:r>
+              <a:rPr sz="1300" b="0">
+                <a:solidFill>
+                  <a:srgbClr val="1F2D3D"/>
+                </a:solidFill>
+                <a:latin typeface="Microsoft YaHei"/>
+              </a:rPr>
+              <a:t>专家粒度是一个 </a:t>
+            </a:r>
+            <a:r>
+              <a:rPr sz="1300" b="1">
+                <a:solidFill>
+                  <a:srgbClr val="2D6A4F"/>
+                </a:solidFill>
+                <a:latin typeface="Microsoft YaHei"/>
+              </a:rPr>
+              <a:t>特化调节旋钮</a:t>
+            </a:r>
+            <a:r>
+              <a:rPr sz="1300" b="0">
+                <a:solidFill>
+                  <a:srgbClr val="1F2D3D"/>
+                </a:solidFill>
+                <a:latin typeface="Microsoft YaHei"/>
+              </a:rPr>
+              <a:t>：</a:t>
+            </a:r>
+          </a:p>
+          <a:p>
+            <a:pPr algn="l">
+              <a:lnSpc>
+                <a:spcPts val="1800"/>
+              </a:lnSpc>
+            </a:pPr>
+            <a:r>
+              <a:rPr sz="1300" b="0">
+                <a:solidFill>
+                  <a:srgbClr val="1F2D3D"/>
+                </a:solidFill>
+                <a:latin typeface="Microsoft YaHei"/>
+              </a:rPr>
+              <a:t>少而宽的专家分化，多而窄的专家趋同。</a:t>
+            </a:r>
+          </a:p>
+        </p:txBody>
+      </p:sp>
+      <p:sp>
+        <p:nvSpPr>
+          <p:cNvPr id="10" name="TextBox 9"/>
+          <p:cNvSpPr txBox="1"/>
+          <p:nvPr/>
+        </p:nvSpPr>
+        <p:spPr>
+          <a:xfrm>
+            <a:off x="11155680" y="6400800"/>
+            <a:ext cx="914400" cy="365760"/>
+          </a:xfrm>
+          <a:prstGeom prst="rect">
+            <a:avLst/>
+          </a:prstGeom>
+          <a:noFill/>
+        </p:spPr>
+        <p:txBody>
+          <a:bodyPr wrap="square">
+            <a:spAutoFit/>
+          </a:bodyPr>
+          <a:lstStyle/>
+          <a:p>
+            <a:pPr algn="r"/>
+            <a:r>
+              <a:rPr sz="1100" b="0">
+                <a:solidFill>
+                  <a:srgbClr val="6B7B8D"/>
+                </a:solidFill>
+                <a:latin typeface="Consolas"/>
+              </a:rPr>
+              <a:t>09 / 10</a:t>
             </a:r>
           </a:p>
         </p:txBody>
